--- a/halodoc-review-analysis/reports/report_halodoc_dokter_obat_dan_lab.pptx
+++ b/halodoc-review-analysis/reports/report_halodoc_dokter_obat_dan_lab.pptx
@@ -10,7 +10,6 @@
     <p:sldId id="258" r:id="rId9"/>
     <p:sldId id="259" r:id="rId10"/>
     <p:sldId id="260" r:id="rId11"/>
-    <p:sldId id="261" r:id="rId12"/>
   </p:sldIdLst>
   <p:sldSz cx="12191695" cy="6858000" type="screen4x3"/>
   <p:notesSz cx="6858000" cy="9144000"/>
@@ -3108,7 +3107,7 @@
             <a:avLst/>
           </a:prstGeom>
           <a:solidFill>
-            <a:srgbClr val="0F172A"/>
+            <a:srgbClr val="090D16"/>
           </a:solidFill>
           <a:ln>
             <a:noFill/>
@@ -3145,7 +3144,50 @@
         <p:spPr>
           <a:xfrm>
             <a:off x="0" y="0"/>
-            <a:ext cx="365760" cy="6858000"/>
+            <a:ext cx="109728" cy="6858000"/>
+          </a:xfrm>
+          <a:prstGeom prst="rect">
+            <a:avLst/>
+          </a:prstGeom>
+          <a:solidFill>
+            <a:srgbClr val="6366F1"/>
+          </a:solidFill>
+          <a:ln>
+            <a:noFill/>
+          </a:ln>
+        </p:spPr>
+        <p:style>
+          <a:lnRef idx="1">
+            <a:schemeClr val="accent1"/>
+          </a:lnRef>
+          <a:fillRef idx="3">
+            <a:schemeClr val="accent1"/>
+          </a:fillRef>
+          <a:effectRef idx="2">
+            <a:schemeClr val="accent1"/>
+          </a:effectRef>
+          <a:fontRef idx="minor">
+            <a:schemeClr val="lt1"/>
+          </a:fontRef>
+        </p:style>
+        <p:txBody>
+          <a:bodyPr rtlCol="0" anchor="ctr"/>
+          <a:lstStyle/>
+          <a:p>
+            <a:pPr algn="ctr"/>
+          </a:p>
+        </p:txBody>
+      </p:sp>
+      <p:sp>
+        <p:nvSpPr>
+          <p:cNvPr id="4" name="Rectangle 3"/>
+          <p:cNvSpPr/>
+          <p:nvPr/>
+        </p:nvSpPr>
+        <p:spPr>
+          <a:xfrm>
+            <a:off x="109728" y="0"/>
+            <a:ext cx="73152" cy="6858000"/>
           </a:xfrm>
           <a:prstGeom prst="rect">
             <a:avLst/>
@@ -3181,14 +3223,143 @@
       </p:sp>
       <p:sp>
         <p:nvSpPr>
-          <p:cNvPr id="4" name="TextBox 3"/>
+          <p:cNvPr id="5" name="Rectangle 4"/>
+          <p:cNvSpPr/>
+          <p:nvPr/>
+        </p:nvSpPr>
+        <p:spPr>
+          <a:xfrm>
+            <a:off x="182880" y="0"/>
+            <a:ext cx="36576" cy="6858000"/>
+          </a:xfrm>
+          <a:prstGeom prst="rect">
+            <a:avLst/>
+          </a:prstGeom>
+          <a:solidFill>
+            <a:srgbClr val="06B6D4"/>
+          </a:solidFill>
+          <a:ln>
+            <a:noFill/>
+          </a:ln>
+        </p:spPr>
+        <p:style>
+          <a:lnRef idx="1">
+            <a:schemeClr val="accent1"/>
+          </a:lnRef>
+          <a:fillRef idx="3">
+            <a:schemeClr val="accent1"/>
+          </a:fillRef>
+          <a:effectRef idx="2">
+            <a:schemeClr val="accent1"/>
+          </a:effectRef>
+          <a:fontRef idx="minor">
+            <a:schemeClr val="lt1"/>
+          </a:fontRef>
+        </p:style>
+        <p:txBody>
+          <a:bodyPr rtlCol="0" anchor="ctr"/>
+          <a:lstStyle/>
+          <a:p>
+            <a:pPr algn="ctr"/>
+          </a:p>
+        </p:txBody>
+      </p:sp>
+      <p:sp>
+        <p:nvSpPr>
+          <p:cNvPr id="6" name="Oval 5"/>
+          <p:cNvSpPr/>
+          <p:nvPr/>
+        </p:nvSpPr>
+        <p:spPr>
+          <a:xfrm>
+            <a:off x="8229600" y="3657600"/>
+            <a:ext cx="5486400" cy="5486400"/>
+          </a:xfrm>
+          <a:prstGeom prst="ellipse">
+            <a:avLst/>
+          </a:prstGeom>
+          <a:solidFill>
+            <a:srgbClr val="13182C"/>
+          </a:solidFill>
+          <a:ln>
+            <a:noFill/>
+          </a:ln>
+        </p:spPr>
+        <p:style>
+          <a:lnRef idx="1">
+            <a:schemeClr val="accent1"/>
+          </a:lnRef>
+          <a:fillRef idx="3">
+            <a:schemeClr val="accent1"/>
+          </a:fillRef>
+          <a:effectRef idx="2">
+            <a:schemeClr val="accent1"/>
+          </a:effectRef>
+          <a:fontRef idx="minor">
+            <a:schemeClr val="lt1"/>
+          </a:fontRef>
+        </p:style>
+        <p:txBody>
+          <a:bodyPr rtlCol="0" anchor="ctr"/>
+          <a:lstStyle/>
+          <a:p>
+            <a:pPr algn="ctr"/>
+          </a:p>
+        </p:txBody>
+      </p:sp>
+      <p:sp>
+        <p:nvSpPr>
+          <p:cNvPr id="7" name="Rectangle 6"/>
+          <p:cNvSpPr/>
+          <p:nvPr/>
+        </p:nvSpPr>
+        <p:spPr>
+          <a:xfrm>
+            <a:off x="1097280" y="3017520"/>
+            <a:ext cx="2286000" cy="36576"/>
+          </a:xfrm>
+          <a:prstGeom prst="rect">
+            <a:avLst/>
+          </a:prstGeom>
+          <a:solidFill>
+            <a:srgbClr val="06B6D4"/>
+          </a:solidFill>
+          <a:ln>
+            <a:noFill/>
+          </a:ln>
+        </p:spPr>
+        <p:style>
+          <a:lnRef idx="1">
+            <a:schemeClr val="accent1"/>
+          </a:lnRef>
+          <a:fillRef idx="3">
+            <a:schemeClr val="accent1"/>
+          </a:fillRef>
+          <a:effectRef idx="2">
+            <a:schemeClr val="accent1"/>
+          </a:effectRef>
+          <a:fontRef idx="minor">
+            <a:schemeClr val="lt1"/>
+          </a:fontRef>
+        </p:style>
+        <p:txBody>
+          <a:bodyPr rtlCol="0" anchor="ctr"/>
+          <a:lstStyle/>
+          <a:p>
+            <a:pPr algn="ctr"/>
+          </a:p>
+        </p:txBody>
+      </p:sp>
+      <p:sp>
+        <p:nvSpPr>
+          <p:cNvPr id="8" name="TextBox 7"/>
           <p:cNvSpPr txBox="1"/>
           <p:nvPr/>
         </p:nvSpPr>
         <p:spPr>
           <a:xfrm>
-            <a:off x="914400" y="1645920"/>
-            <a:ext cx="10362895" cy="4114800"/>
+            <a:off x="1097280" y="914400"/>
+            <a:ext cx="9601200" cy="2011680"/>
           </a:xfrm>
           <a:prstGeom prst="rect">
             <a:avLst/>
@@ -3196,13 +3367,29 @@
           <a:noFill/>
         </p:spPr>
         <p:txBody>
-          <a:bodyPr wrap="square">
+          <a:bodyPr wrap="square" lIns="0" tIns="0" bIns="0" rIns="0">
             <a:spAutoFit/>
           </a:bodyPr>
           <a:lstStyle/>
           <a:p>
             <a:pPr>
-              <a:defRPr sz="3600" b="1">
+              <a:defRPr sz="1500" b="1">
+                <a:solidFill>
+                  <a:srgbClr val="818CF8"/>
+                </a:solidFill>
+                <a:latin typeface="Segoe UI"/>
+              </a:defRPr>
+            </a:pPr>
+            <a:r>
+              <a:t>LAPORAN ANALISIS SENTIMEN ULASAN</a:t>
+            </a:r>
+          </a:p>
+          <a:p>
+            <a:pPr>
+              <a:spcBef>
+                <a:spcPts val="800"/>
+              </a:spcBef>
+              <a:defRPr sz="5000" b="1">
                 <a:solidFill>
                   <a:srgbClr val="FFFFFF"/>
                 </a:solidFill>
@@ -3210,31 +3397,99 @@
               </a:defRPr>
             </a:pPr>
             <a:r>
-              <a:t>LAPORAN ANALISIS SENTIMEN ULASAN</a:t>
+              <a:t>Halodoc: Dokter, Obat &amp; Lab</a:t>
             </a:r>
           </a:p>
           <a:p>
             <a:pPr>
               <a:spcBef>
-                <a:spcPts val="1000"/>
+                <a:spcPts val="800"/>
               </a:spcBef>
-              <a:defRPr sz="2800" b="1">
+              <a:defRPr sz="1500">
                 <a:solidFill>
-                  <a:srgbClr val="60A5FA"/>
+                  <a:srgbClr val="94A3B8"/>
                 </a:solidFill>
                 <a:latin typeface="Segoe UI"/>
               </a:defRPr>
             </a:pPr>
             <a:r>
-              <a:t>Halodoc: Dokter, Obat &amp; Lab</a:t>
-            </a:r>
-          </a:p>
+              <a:t>Analisis Sentimen &amp; Ringkasan Insight Ulasan Pengguna</a:t>
+            </a:r>
+          </a:p>
+        </p:txBody>
+      </p:sp>
+      <p:sp>
+        <p:nvSpPr>
+          <p:cNvPr id="9" name="Rounded Rectangle 8"/>
+          <p:cNvSpPr/>
+          <p:nvPr/>
+        </p:nvSpPr>
+        <p:spPr>
+          <a:xfrm>
+            <a:off x="1097280" y="3383280"/>
+            <a:ext cx="5943600" cy="2011680"/>
+          </a:xfrm>
+          <a:prstGeom prst="roundRect">
+            <a:avLst/>
+          </a:prstGeom>
+          <a:solidFill>
+            <a:srgbClr val="0F172A"/>
+          </a:solidFill>
+          <a:ln w="19050">
+            <a:solidFill>
+              <a:srgbClr val="1E293B"/>
+            </a:solidFill>
+          </a:ln>
+        </p:spPr>
+        <p:style>
+          <a:lnRef idx="1">
+            <a:schemeClr val="accent1"/>
+          </a:lnRef>
+          <a:fillRef idx="3">
+            <a:schemeClr val="accent1"/>
+          </a:fillRef>
+          <a:effectRef idx="2">
+            <a:schemeClr val="accent1"/>
+          </a:effectRef>
+          <a:fontRef idx="minor">
+            <a:schemeClr val="lt1"/>
+          </a:fontRef>
+        </p:style>
+        <p:txBody>
+          <a:bodyPr rtlCol="0" anchor="ctr"/>
+          <a:lstStyle/>
+          <a:p>
+            <a:pPr algn="ctr"/>
+          </a:p>
+        </p:txBody>
+      </p:sp>
+      <p:sp>
+        <p:nvSpPr>
+          <p:cNvPr id="10" name="TextBox 9"/>
+          <p:cNvSpPr txBox="1"/>
+          <p:nvPr/>
+        </p:nvSpPr>
+        <p:spPr>
+          <a:xfrm>
+            <a:off x="1371600" y="3566160"/>
+            <a:ext cx="5486400" cy="1645920"/>
+          </a:xfrm>
+          <a:prstGeom prst="rect">
+            <a:avLst/>
+          </a:prstGeom>
+          <a:noFill/>
+        </p:spPr>
+        <p:txBody>
+          <a:bodyPr wrap="square" lIns="0" tIns="0" bIns="0" rIns="0">
+            <a:spAutoFit/>
+          </a:bodyPr>
+          <a:lstStyle/>
           <a:p>
             <a:pPr>
-              <a:spcBef>
-                <a:spcPts val="3000"/>
-              </a:spcBef>
-              <a:defRPr sz="1600">
+              <a:spcAft>
+                <a:spcPts val="800"/>
+              </a:spcAft>
+              <a:defRPr sz="1100" b="1">
                 <a:solidFill>
                   <a:srgbClr val="64748B"/>
                 </a:solidFill>
@@ -3242,27 +3497,88 @@
               </a:defRPr>
             </a:pPr>
             <a:r>
-              <a:t>CaRI Sentimen ID — Capybara Review Intelligence</a:t>
+              <a:t>DETAIL LAPORAN</a:t>
             </a:r>
           </a:p>
           <a:p>
             <a:pPr>
-              <a:spcBef>
-                <a:spcPts val="2000"/>
-              </a:spcBef>
-              <a:defRPr sz="1300">
+              <a:defRPr sz="1100">
                 <a:solidFill>
-                  <a:srgbClr val="8492A6"/>
+                  <a:srgbClr val="E2E8F0"/>
                 </a:solidFill>
                 <a:latin typeface="Segoe UI"/>
               </a:defRPr>
             </a:pPr>
             <a:r>
-              <a:t>Periode Data: 2023-06-15 s/d 2026-06-15</a:t>
-            </a:r>
-            <a:br/>
-            <a:r>
-              <a:t>Tanggal Generate: 23 June 2026</a:t>
+              <a:t>• Periode Data: 2023-06-15 s/d 2026-06-15</a:t>
+            </a:r>
+          </a:p>
+          <a:p>
+            <a:pPr>
+              <a:spcBef>
+                <a:spcPts val="400"/>
+              </a:spcBef>
+              <a:defRPr sz="1100" b="1">
+                <a:solidFill>
+                  <a:srgbClr val="38BDF8"/>
+                </a:solidFill>
+                <a:latin typeface="Segoe UI"/>
+              </a:defRPr>
+            </a:pPr>
+            <a:r>
+              <a:t>• Total Ulasan: 15,629 ulasan</a:t>
+            </a:r>
+          </a:p>
+          <a:p>
+            <a:pPr>
+              <a:spcBef>
+                <a:spcPts val="400"/>
+              </a:spcBef>
+              <a:defRPr sz="1100">
+                <a:solidFill>
+                  <a:srgbClr val="E2E8F0"/>
+                </a:solidFill>
+                <a:latin typeface="Segoe UI"/>
+              </a:defRPr>
+            </a:pPr>
+            <a:r>
+              <a:t>• Tanggal Terbit: 23 June 2026</a:t>
+            </a:r>
+          </a:p>
+        </p:txBody>
+      </p:sp>
+      <p:sp>
+        <p:nvSpPr>
+          <p:cNvPr id="11" name="TextBox 10"/>
+          <p:cNvSpPr txBox="1"/>
+          <p:nvPr/>
+        </p:nvSpPr>
+        <p:spPr>
+          <a:xfrm>
+            <a:off x="1097280" y="5852160"/>
+            <a:ext cx="9601200" cy="457200"/>
+          </a:xfrm>
+          <a:prstGeom prst="rect">
+            <a:avLst/>
+          </a:prstGeom>
+          <a:noFill/>
+        </p:spPr>
+        <p:txBody>
+          <a:bodyPr wrap="none">
+            <a:spAutoFit/>
+          </a:bodyPr>
+          <a:lstStyle/>
+          <a:p>
+            <a:pPr>
+              <a:defRPr sz="1000">
+                <a:solidFill>
+                  <a:srgbClr val="475569"/>
+                </a:solidFill>
+                <a:latin typeface="Segoe UI"/>
+              </a:defRPr>
+            </a:pPr>
+            <a:r>
+              <a:t>CaRI Sentimen ID  |  Powered by BERTopic, IndoBERT &amp; LLM</a:t>
             </a:r>
           </a:p>
         </p:txBody>
@@ -4041,7 +4357,7 @@
               </a:defRPr>
             </a:pPr>
             <a:r>
-              <a:t>• Aplikasi Halodoc memiliki basis pengguna yang sangat loyal dengan total 15.629 ulasan. Distribusi sentimen menunjukkan dominasi sentimen positif sebesar 88,76% (13.873 ulasan), diikuti sentimen negatif (9,78%) dan netral (1,46%).</a:t>
+              <a:t>• Data mencakup 15.629 ulasan yang dikumpulkan selama periode 15 Juni 2023 hingga 15 Juni 2026. Distribusi sentimen menunjukkan dominasi positif yang sangat kuat sebesar 88,76% (13.873 ulasan), diikuti sentimen negatif 9,78% (1.528 ulasan) dan netral 1,46% (228 ulasan).</a:t>
             </a:r>
           </a:p>
           <a:p>
@@ -4057,23 +4373,7 @@
               </a:defRPr>
             </a:pPr>
             <a:r>
-              <a:t>• Polarisasi Rating: Terdapat polarisasi yang sangat tajam di mana 83,6% dari total ulasan memberikan rating bintang 5 (13.074 ulasan). Hal ini menunjukkan *brand advocacy* yang sangat kuat.</a:t>
-            </a:r>
-          </a:p>
-          <a:p>
-            <a:pPr>
-              <a:spcAft>
-                <a:spcPts val="1200"/>
-              </a:spcAft>
-              <a:defRPr sz="1300">
-                <a:solidFill>
-                  <a:srgbClr val="4A5568"/>
-                </a:solidFill>
-                <a:latin typeface="Segoe UI"/>
-              </a:defRPr>
-            </a:pPr>
-            <a:r>
-              <a:t>• Kepercayaan Data: Model klasifikasi sentimen memiliki tingkat keyakinan (*confidence rate*) yang sangat tinggi, mencapai 97,34%, sehingga data ini sangat valid untuk dijadikan dasar pengambilan keputusan.</a:t>
+              <a:t>• Terjadi polarisasi ekstrem pada distribusi rating: 83,65% (13.074) dari total ulasan memberikan rating bintang 5, yang mengindikasikan loyalitas pengguna sangat tinggi. Tingkat kepercayaan klasifikasi model secara keseluruhan mencapai 0,9734, mencerminkan akurasi tinggi dalam kategorisasi data.</a:t>
             </a:r>
           </a:p>
         </p:txBody>
@@ -4854,309 +5154,6 @@
             </a:pPr>
             <a:r>
               <a:t>Evaluasi CS: Rata-rata reply rate penanganan keluhan adalah 99.8%. Median delay tanggapan berkisar antara 0.21 - 0.94 jam. Penanganan diarahkan dengan rata-rata pengalihan kontak bantuan/layanan admin sebesar 99.6%.</a:t>
-            </a:r>
-          </a:p>
-        </p:txBody>
-      </p:sp>
-    </p:spTree>
-  </p:cSld>
-  <p:clrMapOvr>
-    <a:masterClrMapping/>
-  </p:clrMapOvr>
-</p:sld>
-</file>
-
-<file path=ppt/slides/slide6.xml><?xml version="1.0" encoding="utf-8"?>
-<p:sld xmlns:a="http://schemas.openxmlformats.org/drawingml/2006/main" xmlns:p="http://schemas.openxmlformats.org/presentationml/2006/main" xmlns:r="http://schemas.openxmlformats.org/officeDocument/2006/relationships">
-  <p:cSld>
-    <p:spTree>
-      <p:nvGrpSpPr>
-        <p:cNvPr id="1" name=""/>
-        <p:cNvGrpSpPr/>
-        <p:nvPr/>
-      </p:nvGrpSpPr>
-      <p:grpSpPr/>
-      <p:sp>
-        <p:nvSpPr>
-          <p:cNvPr id="2" name="Rectangle 1"/>
-          <p:cNvSpPr/>
-          <p:nvPr/>
-        </p:nvSpPr>
-        <p:spPr>
-          <a:xfrm>
-            <a:off x="0" y="0"/>
-            <a:ext cx="12191695" cy="6858000"/>
-          </a:xfrm>
-          <a:prstGeom prst="rect">
-            <a:avLst/>
-          </a:prstGeom>
-          <a:solidFill>
-            <a:srgbClr val="F8FAFC"/>
-          </a:solidFill>
-          <a:ln>
-            <a:noFill/>
-          </a:ln>
-        </p:spPr>
-        <p:style>
-          <a:lnRef idx="1">
-            <a:schemeClr val="accent1"/>
-          </a:lnRef>
-          <a:fillRef idx="3">
-            <a:schemeClr val="accent1"/>
-          </a:fillRef>
-          <a:effectRef idx="2">
-            <a:schemeClr val="accent1"/>
-          </a:effectRef>
-          <a:fontRef idx="minor">
-            <a:schemeClr val="lt1"/>
-          </a:fontRef>
-        </p:style>
-        <p:txBody>
-          <a:bodyPr rtlCol="0" anchor="ctr"/>
-          <a:lstStyle/>
-          <a:p>
-            <a:pPr algn="ctr"/>
-          </a:p>
-        </p:txBody>
-      </p:sp>
-      <p:sp>
-        <p:nvSpPr>
-          <p:cNvPr id="3" name="Rectangle 2"/>
-          <p:cNvSpPr/>
-          <p:nvPr/>
-        </p:nvSpPr>
-        <p:spPr>
-          <a:xfrm>
-            <a:off x="0" y="0"/>
-            <a:ext cx="12191695" cy="1005840"/>
-          </a:xfrm>
-          <a:prstGeom prst="rect">
-            <a:avLst/>
-          </a:prstGeom>
-          <a:solidFill>
-            <a:srgbClr val="1E293B"/>
-          </a:solidFill>
-          <a:ln>
-            <a:noFill/>
-          </a:ln>
-        </p:spPr>
-        <p:style>
-          <a:lnRef idx="1">
-            <a:schemeClr val="accent1"/>
-          </a:lnRef>
-          <a:fillRef idx="3">
-            <a:schemeClr val="accent1"/>
-          </a:fillRef>
-          <a:effectRef idx="2">
-            <a:schemeClr val="accent1"/>
-          </a:effectRef>
-          <a:fontRef idx="minor">
-            <a:schemeClr val="lt1"/>
-          </a:fontRef>
-        </p:style>
-        <p:txBody>
-          <a:bodyPr rtlCol="0" anchor="ctr"/>
-          <a:lstStyle/>
-          <a:p>
-            <a:pPr algn="ctr"/>
-          </a:p>
-        </p:txBody>
-      </p:sp>
-      <p:sp>
-        <p:nvSpPr>
-          <p:cNvPr id="4" name="TextBox 3"/>
-          <p:cNvSpPr txBox="1"/>
-          <p:nvPr/>
-        </p:nvSpPr>
-        <p:spPr>
-          <a:xfrm>
-            <a:off x="548640" y="137160"/>
-            <a:ext cx="11094415" cy="731520"/>
-          </a:xfrm>
-          <a:prstGeom prst="rect">
-            <a:avLst/>
-          </a:prstGeom>
-          <a:noFill/>
-        </p:spPr>
-        <p:txBody>
-          <a:bodyPr wrap="square">
-            <a:spAutoFit/>
-          </a:bodyPr>
-          <a:lstStyle/>
-          <a:p>
-            <a:pPr>
-              <a:defRPr sz="2400" b="1">
-                <a:solidFill>
-                  <a:srgbClr val="FFFFFF"/>
-                </a:solidFill>
-                <a:latin typeface="Segoe UI"/>
-              </a:defRPr>
-            </a:pPr>
-            <a:r>
-              <a:t>Rekomendasi Tindakan Strategis</a:t>
-            </a:r>
-          </a:p>
-        </p:txBody>
-      </p:sp>
-      <p:sp>
-        <p:nvSpPr>
-          <p:cNvPr id="5" name="TextBox 4"/>
-          <p:cNvSpPr txBox="1"/>
-          <p:nvPr/>
-        </p:nvSpPr>
-        <p:spPr>
-          <a:xfrm>
-            <a:off x="548640" y="6400800"/>
-            <a:ext cx="11094415" cy="365760"/>
-          </a:xfrm>
-          <a:prstGeom prst="rect">
-            <a:avLst/>
-          </a:prstGeom>
-          <a:noFill/>
-        </p:spPr>
-        <p:txBody>
-          <a:bodyPr wrap="none">
-            <a:spAutoFit/>
-          </a:bodyPr>
-          <a:lstStyle/>
-          <a:p>
-            <a:pPr>
-              <a:defRPr sz="1000" i="1">
-                <a:solidFill>
-                  <a:srgbClr val="64748B"/>
-                </a:solidFill>
-                <a:latin typeface="Segoe UI"/>
-              </a:defRPr>
-            </a:pPr>
-            <a:r>
-              <a:t>Laporan Analisis Sentimen Ulasan | CaRI Sentimen ID</a:t>
-            </a:r>
-          </a:p>
-        </p:txBody>
-      </p:sp>
-      <p:pic>
-        <p:nvPicPr>
-          <p:cNvPr id="6" name="Picture 5" descr="13_monthly_trend.png"/>
-          <p:cNvPicPr>
-            <a:picLocks noChangeAspect="1"/>
-          </p:cNvPicPr>
-          <p:nvPr/>
-        </p:nvPicPr>
-        <p:blipFill>
-          <a:blip r:embed="rId2"/>
-          <a:stretch>
-            <a:fillRect/>
-          </a:stretch>
-        </p:blipFill>
-        <p:spPr>
-          <a:xfrm>
-            <a:off x="731520" y="1965960"/>
-            <a:ext cx="4754880" cy="2743200"/>
-          </a:xfrm>
-          <a:prstGeom prst="rect">
-            <a:avLst/>
-          </a:prstGeom>
-        </p:spPr>
-      </p:pic>
-      <p:sp>
-        <p:nvSpPr>
-          <p:cNvPr id="7" name="TextBox 6"/>
-          <p:cNvSpPr txBox="1"/>
-          <p:nvPr/>
-        </p:nvSpPr>
-        <p:spPr>
-          <a:xfrm>
-            <a:off x="5852160" y="1463040"/>
-            <a:ext cx="5669280" cy="4572000"/>
-          </a:xfrm>
-          <a:prstGeom prst="rect">
-            <a:avLst/>
-          </a:prstGeom>
-          <a:noFill/>
-        </p:spPr>
-        <p:txBody>
-          <a:bodyPr wrap="square">
-            <a:spAutoFit/>
-          </a:bodyPr>
-          <a:lstStyle/>
-          <a:p>
-            <a:pPr>
-              <a:spcAft>
-                <a:spcPts val="1200"/>
-              </a:spcAft>
-              <a:defRPr sz="1600" b="1">
-                <a:solidFill>
-                  <a:srgbClr val="1E293B"/>
-                </a:solidFill>
-                <a:latin typeface="Segoe UI"/>
-              </a:defRPr>
-            </a:pPr>
-            <a:r>
-              <a:t>Rekomendasi Bisnis &amp; Operasional:</a:t>
-            </a:r>
-          </a:p>
-          <a:p>
-            <a:pPr>
-              <a:spcAft>
-                <a:spcPts val="1000"/>
-              </a:spcAft>
-              <a:defRPr sz="1200">
-                <a:solidFill>
-                  <a:srgbClr val="2D3748"/>
-                </a:solidFill>
-                <a:latin typeface="Segoe UI"/>
-              </a:defRPr>
-            </a:pPr>
-            <a:r>
-              <a:t>• Perbaikan Backend Transaksi: Prioritaskan perbaikan *callback system* antara *payment gateway* dan ruang chat. Keluhan "saldo terpotong tapi chat tidak ada" adalah *critical point* yang harus dihilangkan untuk menjaga kepercayaan pengguna.</a:t>
-            </a:r>
-          </a:p>
-          <a:p>
-            <a:pPr>
-              <a:spcAft>
-                <a:spcPts val="1000"/>
-              </a:spcAft>
-              <a:defRPr sz="1200">
-                <a:solidFill>
-                  <a:srgbClr val="2D3748"/>
-                </a:solidFill>
-                <a:latin typeface="Segoe UI"/>
-              </a:defRPr>
-            </a:pPr>
-            <a:r>
-              <a:t>• Audit Versi Aplikasi: Segera identifikasi 2.479 ulasan dengan versi "Unknown". Lakukan *mandatory update* atau pengetatan deteksi versi agar data *crash* lebih akurat.</a:t>
-            </a:r>
-          </a:p>
-          <a:p>
-            <a:pPr>
-              <a:spcAft>
-                <a:spcPts val="1000"/>
-              </a:spcAft>
-              <a:defRPr sz="1200">
-                <a:solidFill>
-                  <a:srgbClr val="2D3748"/>
-                </a:solidFill>
-                <a:latin typeface="Segoe UI"/>
-              </a:defRPr>
-            </a:pPr>
-            <a:r>
-              <a:t>• Mekanisme Refund Otomatis: Mengingat tingginya keluhan terkait pembayaran, buatlah sistem *self-service refund* di aplikasi untuk sesi chat yang gagal, guna mengurangi beban tim CS.</a:t>
-            </a:r>
-          </a:p>
-          <a:p>
-            <a:pPr>
-              <a:spcAft>
-                <a:spcPts val="1000"/>
-              </a:spcAft>
-              <a:defRPr sz="1200">
-                <a:solidFill>
-                  <a:srgbClr val="2D3748"/>
-                </a:solidFill>
-                <a:latin typeface="Segoe UI"/>
-              </a:defRPr>
-            </a:pPr>
-            <a:r>
-              <a:t>• Optimasi SLA Respons: Fokuskan penambahan SDM/Automasi untuk kategori "Layanan Pelanggan" yang memiliki *reply rate* terendah (98,41%).</a:t>
             </a:r>
           </a:p>
         </p:txBody>

--- a/halodoc-review-analysis/reports/report_halodoc_dokter_obat_dan_lab.pptx
+++ b/halodoc-review-analysis/reports/report_halodoc_dokter_obat_dan_lab.pptx
@@ -3542,7 +3542,7 @@
               </a:defRPr>
             </a:pPr>
             <a:r>
-              <a:t>• Tanggal Terbit: 23 June 2026</a:t>
+              <a:t>• Tanggal Terbit: 25 June 2026</a:t>
             </a:r>
           </a:p>
         </p:txBody>
@@ -4378,6 +4378,42 @@
           </a:p>
         </p:txBody>
       </p:sp>
+      <p:sp>
+        <p:nvSpPr>
+          <p:cNvPr id="19" name="TextBox 18"/>
+          <p:cNvSpPr txBox="1"/>
+          <p:nvPr/>
+        </p:nvSpPr>
+        <p:spPr>
+          <a:xfrm>
+            <a:off x="731520" y="6126480"/>
+            <a:ext cx="10698480" cy="320040"/>
+          </a:xfrm>
+          <a:prstGeom prst="rect">
+            <a:avLst/>
+          </a:prstGeom>
+          <a:noFill/>
+        </p:spPr>
+        <p:txBody>
+          <a:bodyPr wrap="square" lIns="0" tIns="0" bIns="0" rIns="0">
+            <a:spAutoFit/>
+          </a:bodyPr>
+          <a:lstStyle/>
+          <a:p>
+            <a:pPr>
+              <a:defRPr sz="850">
+                <a:solidFill>
+                  <a:srgbClr val="718096"/>
+                </a:solidFill>
+                <a:latin typeface="Segoe UI"/>
+              </a:defRPr>
+            </a:pPr>
+            <a:r>
+              <a:t>⚠️ Catatan Cakupan Data: Analisis ini hanya mencakup ulasan yang memiliki teks komentar. Ulasan dengan rating tanpa komentar tidak diikutsertakan, sehingga distribusi sentimen mencerminkan pengguna yang aktif memberikan pendapat dan dapat condong ke arah negatif dibanding populasi pengguna keseluruhan.</a:t>
+            </a:r>
+          </a:p>
+        </p:txBody>
+      </p:sp>
     </p:spTree>
   </p:cSld>
   <p:clrMapOvr>
@@ -5153,7 +5189,7 @@
               </a:defRPr>
             </a:pPr>
             <a:r>
-              <a:t>Evaluasi CS: Rata-rata reply rate penanganan keluhan adalah 99.8%. Median delay tanggapan berkisar antara 0.21 - 0.94 jam. Penanganan diarahkan dengan rata-rata pengalihan kontak bantuan/layanan admin sebesar 99.6%.</a:t>
+              <a:t>Evaluasi CS: Rata-rata reply rate penanganan keluhan adalah 99.8%. Median delay tanggapan berkisar antara 0.0 jam. Penanganan diarahkan dengan rata-rata pengalihan kontak bantuan/layanan admin sebesar 99.6%.</a:t>
             </a:r>
           </a:p>
         </p:txBody>
